--- a/skills/uav-paper-report/assets/examples/uav-multi-quad-cbf-report.pptx
+++ b/skills/uav-paper-report/assets/examples/uav-multi-quad-cbf-report.pptx
@@ -3099,7 +3099,7 @@
 </file>
 
 <file path=ppt/slides/slide1.xml><?xml version="1.0" encoding="utf-8"?>
-<p:sld xmlns:a="http://schemas.openxmlformats.org/drawingml/2006/main" xmlns:p="http://schemas.openxmlformats.org/presentationml/2006/main" xmlns:r="http://schemas.openxmlformats.org/officeDocument/2006/relationships">
+<p:sld xmlns:a="http://schemas.openxmlformats.org/drawingml/2006/main" xmlns:ns2="http://schemas.openxmlformats.org/officeDocument/2006/relationships" xmlns:p="http://schemas.openxmlformats.org/presentationml/2006/main">
   <p:cSld>
     <p:spTree>
       <p:nvGrpSpPr>
@@ -3117,7 +3117,7 @@
           <p:nvPr/>
         </p:nvPicPr>
         <p:blipFill>
-          <a:blip r:embed="rId2"/>
+          <a:blip ns2:embed="rId2"/>
           <a:stretch>
             <a:fillRect/>
           </a:stretch>
@@ -3167,13 +3167,6 @@
             <a:schemeClr val="lt1"/>
           </a:fontRef>
         </p:style>
-        <p:txBody>
-          <a:bodyPr rtlCol="0" anchor="ctr"/>
-          <a:lstStyle/>
-          <a:p>
-            <a:pPr algn="ctr"/>
-          </a:p>
-        </p:txBody>
       </p:sp>
       <p:sp>
         <p:nvSpPr>
@@ -3337,7 +3330,7 @@
 </file>
 
 <file path=ppt/slides/slide10.xml><?xml version="1.0" encoding="utf-8"?>
-<p:sld xmlns:a="http://schemas.openxmlformats.org/drawingml/2006/main" xmlns:p="http://schemas.openxmlformats.org/presentationml/2006/main" xmlns:r="http://schemas.openxmlformats.org/officeDocument/2006/relationships">
+<p:sld xmlns:a="http://schemas.openxmlformats.org/drawingml/2006/main" xmlns:ns2="http://schemas.openxmlformats.org/officeDocument/2006/relationships" xmlns:p="http://schemas.openxmlformats.org/presentationml/2006/main">
   <p:cSld>
     <p:spTree>
       <p:nvGrpSpPr>
@@ -3381,13 +3374,6 @@
             <a:schemeClr val="lt1"/>
           </a:fontRef>
         </p:style>
-        <p:txBody>
-          <a:bodyPr rtlCol="0" anchor="ctr"/>
-          <a:lstStyle/>
-          <a:p>
-            <a:pPr algn="ctr"/>
-          </a:p>
-        </p:txBody>
       </p:sp>
       <p:pic>
         <p:nvPicPr>
@@ -3398,7 +3384,7 @@
           <p:nvPr/>
         </p:nvPicPr>
         <p:blipFill>
-          <a:blip r:embed="rId2"/>
+          <a:blip ns2:embed="rId2"/>
           <a:stretch>
             <a:fillRect/>
           </a:stretch>
@@ -4967,7 +4953,7 @@
 </file>
 
 <file path=ppt/slides/slide11.xml><?xml version="1.0" encoding="utf-8"?>
-<p:sld xmlns:a="http://schemas.openxmlformats.org/drawingml/2006/main" xmlns:p="http://schemas.openxmlformats.org/presentationml/2006/main" xmlns:r="http://schemas.openxmlformats.org/officeDocument/2006/relationships">
+<p:sld xmlns:a="http://schemas.openxmlformats.org/drawingml/2006/main" xmlns:ns2="http://schemas.openxmlformats.org/officeDocument/2006/relationships" xmlns:p="http://schemas.openxmlformats.org/presentationml/2006/main">
   <p:cSld>
     <p:spTree>
       <p:nvGrpSpPr>
@@ -5011,13 +4997,6 @@
             <a:schemeClr val="lt1"/>
           </a:fontRef>
         </p:style>
-        <p:txBody>
-          <a:bodyPr rtlCol="0" anchor="ctr"/>
-          <a:lstStyle/>
-          <a:p>
-            <a:pPr algn="ctr"/>
-          </a:p>
-        </p:txBody>
       </p:sp>
       <p:pic>
         <p:nvPicPr>
@@ -5028,7 +5007,7 @@
           <p:nvPr/>
         </p:nvPicPr>
         <p:blipFill>
-          <a:blip r:embed="rId2"/>
+          <a:blip ns2:embed="rId2"/>
           <a:stretch>
             <a:fillRect/>
           </a:stretch>
@@ -5594,33 +5573,6 @@
           </a:prstGeom>
           <a:noFill/>
         </p:spPr>
-        <p:txBody>
-          <a:bodyPr wrap="square" lIns="0" rIns="0" tIns="0" bIns="0">
-            <a:spAutoFit/>
-          </a:bodyPr>
-          <a:lstStyle/>
-          <a:p>
-            <a:pPr algn="r">
-              <a:spcBef>
-                <a:spcPts val="0"/>
-              </a:spcBef>
-              <a:spcAft>
-                <a:spcPts val="0"/>
-              </a:spcAft>
-            </a:pPr>
-            <a:r>
-              <a:rPr sz="2100" b="1">
-                <a:solidFill>
-                  <a:srgbClr val="4E4E4E"/>
-                </a:solidFill>
-                <a:latin typeface="Times New Roman"/>
-                <a:ea typeface="Times New Roman"/>
-                <a:cs typeface="Times New Roman"/>
-              </a:rPr>
-              <a:t/>
-            </a:r>
-          </a:p>
-        </p:txBody>
       </p:sp>
       <p:sp>
         <p:nvSpPr>
@@ -6242,7 +6194,7 @@
 </file>
 
 <file path=ppt/slides/slide12.xml><?xml version="1.0" encoding="utf-8"?>
-<p:sld xmlns:a="http://schemas.openxmlformats.org/drawingml/2006/main" xmlns:p="http://schemas.openxmlformats.org/presentationml/2006/main" xmlns:r="http://schemas.openxmlformats.org/officeDocument/2006/relationships">
+<p:sld xmlns:a="http://schemas.openxmlformats.org/drawingml/2006/main" xmlns:ns2="http://schemas.openxmlformats.org/officeDocument/2006/relationships" xmlns:p="http://schemas.openxmlformats.org/presentationml/2006/main">
   <p:cSld>
     <p:spTree>
       <p:nvGrpSpPr>
@@ -6286,13 +6238,6 @@
             <a:schemeClr val="lt1"/>
           </a:fontRef>
         </p:style>
-        <p:txBody>
-          <a:bodyPr rtlCol="0" anchor="ctr"/>
-          <a:lstStyle/>
-          <a:p>
-            <a:pPr algn="ctr"/>
-          </a:p>
-        </p:txBody>
       </p:sp>
       <p:pic>
         <p:nvPicPr>
@@ -6303,7 +6248,7 @@
           <p:nvPr/>
         </p:nvPicPr>
         <p:blipFill>
-          <a:blip r:embed="rId2"/>
+          <a:blip ns2:embed="rId2"/>
           <a:stretch>
             <a:fillRect/>
           </a:stretch>
@@ -7535,7 +7480,7 @@
 </file>
 
 <file path=ppt/slides/slide13.xml><?xml version="1.0" encoding="utf-8"?>
-<p:sld xmlns:a="http://schemas.openxmlformats.org/drawingml/2006/main" xmlns:p="http://schemas.openxmlformats.org/presentationml/2006/main" xmlns:r="http://schemas.openxmlformats.org/officeDocument/2006/relationships">
+<p:sld xmlns:a="http://schemas.openxmlformats.org/drawingml/2006/main" xmlns:ns2="http://schemas.openxmlformats.org/officeDocument/2006/relationships" xmlns:p="http://schemas.openxmlformats.org/presentationml/2006/main">
   <p:cSld>
     <p:spTree>
       <p:nvGrpSpPr>
@@ -7579,13 +7524,6 @@
             <a:schemeClr val="lt1"/>
           </a:fontRef>
         </p:style>
-        <p:txBody>
-          <a:bodyPr rtlCol="0" anchor="ctr"/>
-          <a:lstStyle/>
-          <a:p>
-            <a:pPr algn="ctr"/>
-          </a:p>
-        </p:txBody>
       </p:sp>
       <p:pic>
         <p:nvPicPr>
@@ -7596,7 +7534,7 @@
           <p:nvPr/>
         </p:nvPicPr>
         <p:blipFill>
-          <a:blip r:embed="rId2"/>
+          <a:blip ns2:embed="rId2"/>
           <a:stretch>
             <a:fillRect/>
           </a:stretch>
@@ -7708,7 +7646,7 @@
           <p:nvPr/>
         </p:nvPicPr>
         <p:blipFill>
-          <a:blip r:embed="rId3"/>
+          <a:blip ns2:embed="rId3"/>
           <a:stretch>
             <a:fillRect/>
           </a:stretch>
@@ -8349,7 +8287,7 @@
 </file>
 
 <file path=ppt/slides/slide14.xml><?xml version="1.0" encoding="utf-8"?>
-<p:sld xmlns:a="http://schemas.openxmlformats.org/drawingml/2006/main" xmlns:p="http://schemas.openxmlformats.org/presentationml/2006/main" xmlns:r="http://schemas.openxmlformats.org/officeDocument/2006/relationships">
+<p:sld xmlns:a="http://schemas.openxmlformats.org/drawingml/2006/main" xmlns:ns2="http://schemas.openxmlformats.org/officeDocument/2006/relationships" xmlns:p="http://schemas.openxmlformats.org/presentationml/2006/main">
   <p:cSld>
     <p:spTree>
       <p:nvGrpSpPr>
@@ -8393,13 +8331,6 @@
             <a:schemeClr val="lt1"/>
           </a:fontRef>
         </p:style>
-        <p:txBody>
-          <a:bodyPr rtlCol="0" anchor="ctr"/>
-          <a:lstStyle/>
-          <a:p>
-            <a:pPr algn="ctr"/>
-          </a:p>
-        </p:txBody>
       </p:sp>
       <p:pic>
         <p:nvPicPr>
@@ -8410,7 +8341,7 @@
           <p:nvPr/>
         </p:nvPicPr>
         <p:blipFill>
-          <a:blip r:embed="rId2"/>
+          <a:blip ns2:embed="rId2"/>
           <a:stretch>
             <a:fillRect/>
           </a:stretch>
@@ -8569,7 +8500,7 @@
           <p:nvPr/>
         </p:nvPicPr>
         <p:blipFill>
-          <a:blip r:embed="rId3"/>
+          <a:blip ns2:embed="rId3"/>
           <a:stretch>
             <a:fillRect/>
           </a:stretch>
@@ -8792,7 +8723,7 @@
 </file>
 
 <file path=ppt/slides/slide15.xml><?xml version="1.0" encoding="utf-8"?>
-<p:sld xmlns:a="http://schemas.openxmlformats.org/drawingml/2006/main" xmlns:p="http://schemas.openxmlformats.org/presentationml/2006/main" xmlns:r="http://schemas.openxmlformats.org/officeDocument/2006/relationships">
+<p:sld xmlns:a="http://schemas.openxmlformats.org/drawingml/2006/main" xmlns:ns2="http://schemas.openxmlformats.org/officeDocument/2006/relationships" xmlns:p="http://schemas.openxmlformats.org/presentationml/2006/main">
   <p:cSld>
     <p:spTree>
       <p:nvGrpSpPr>
@@ -8836,13 +8767,6 @@
             <a:schemeClr val="lt1"/>
           </a:fontRef>
         </p:style>
-        <p:txBody>
-          <a:bodyPr rtlCol="0" anchor="ctr"/>
-          <a:lstStyle/>
-          <a:p>
-            <a:pPr algn="ctr"/>
-          </a:p>
-        </p:txBody>
       </p:sp>
       <p:pic>
         <p:nvPicPr>
@@ -8853,7 +8777,7 @@
           <p:nvPr/>
         </p:nvPicPr>
         <p:blipFill>
-          <a:blip r:embed="rId2"/>
+          <a:blip ns2:embed="rId2"/>
           <a:stretch>
             <a:fillRect/>
           </a:stretch>
@@ -10383,7 +10307,7 @@
 </file>
 
 <file path=ppt/slides/slide16.xml><?xml version="1.0" encoding="utf-8"?>
-<p:sld xmlns:a="http://schemas.openxmlformats.org/drawingml/2006/main" xmlns:p="http://schemas.openxmlformats.org/presentationml/2006/main" xmlns:r="http://schemas.openxmlformats.org/officeDocument/2006/relationships">
+<p:sld xmlns:a="http://schemas.openxmlformats.org/drawingml/2006/main" xmlns:ns2="http://schemas.openxmlformats.org/officeDocument/2006/relationships" xmlns:p="http://schemas.openxmlformats.org/presentationml/2006/main">
   <p:cSld>
     <p:spTree>
       <p:nvGrpSpPr>
@@ -10427,13 +10351,6 @@
             <a:schemeClr val="lt1"/>
           </a:fontRef>
         </p:style>
-        <p:txBody>
-          <a:bodyPr rtlCol="0" anchor="ctr"/>
-          <a:lstStyle/>
-          <a:p>
-            <a:pPr algn="ctr"/>
-          </a:p>
-        </p:txBody>
       </p:sp>
       <p:pic>
         <p:nvPicPr>
@@ -10444,7 +10361,7 @@
           <p:nvPr/>
         </p:nvPicPr>
         <p:blipFill>
-          <a:blip r:embed="rId2"/>
+          <a:blip ns2:embed="rId2"/>
           <a:stretch>
             <a:fillRect/>
           </a:stretch>
@@ -10625,7 +10542,7 @@
           <p:nvPr/>
         </p:nvPicPr>
         <p:blipFill>
-          <a:blip r:embed="rId3"/>
+          <a:blip ns2:embed="rId3"/>
           <a:stretch>
             <a:fillRect/>
           </a:stretch>
@@ -10848,7 +10765,7 @@
 </file>
 
 <file path=ppt/slides/slide17.xml><?xml version="1.0" encoding="utf-8"?>
-<p:sld xmlns:a="http://schemas.openxmlformats.org/drawingml/2006/main" xmlns:p="http://schemas.openxmlformats.org/presentationml/2006/main" xmlns:r="http://schemas.openxmlformats.org/officeDocument/2006/relationships">
+<p:sld xmlns:a="http://schemas.openxmlformats.org/drawingml/2006/main" xmlns:ns2="http://schemas.openxmlformats.org/officeDocument/2006/relationships" xmlns:p="http://schemas.openxmlformats.org/presentationml/2006/main">
   <p:cSld>
     <p:spTree>
       <p:nvGrpSpPr>
@@ -10892,13 +10809,6 @@
             <a:schemeClr val="lt1"/>
           </a:fontRef>
         </p:style>
-        <p:txBody>
-          <a:bodyPr rtlCol="0" anchor="ctr"/>
-          <a:lstStyle/>
-          <a:p>
-            <a:pPr algn="ctr"/>
-          </a:p>
-        </p:txBody>
       </p:sp>
       <p:pic>
         <p:nvPicPr>
@@ -10909,7 +10819,7 @@
           <p:nvPr/>
         </p:nvPicPr>
         <p:blipFill>
-          <a:blip r:embed="rId2"/>
+          <a:blip ns2:embed="rId2"/>
           <a:stretch>
             <a:fillRect/>
           </a:stretch>
@@ -11888,7 +11798,7 @@
 </file>
 
 <file path=ppt/slides/slide18.xml><?xml version="1.0" encoding="utf-8"?>
-<p:sld xmlns:a="http://schemas.openxmlformats.org/drawingml/2006/main" xmlns:p="http://schemas.openxmlformats.org/presentationml/2006/main" xmlns:r="http://schemas.openxmlformats.org/officeDocument/2006/relationships">
+<p:sld xmlns:a="http://schemas.openxmlformats.org/drawingml/2006/main" xmlns:ns2="http://schemas.openxmlformats.org/officeDocument/2006/relationships" xmlns:p="http://schemas.openxmlformats.org/presentationml/2006/main">
   <p:cSld>
     <p:spTree>
       <p:nvGrpSpPr>
@@ -11932,13 +11842,6 @@
             <a:schemeClr val="lt1"/>
           </a:fontRef>
         </p:style>
-        <p:txBody>
-          <a:bodyPr rtlCol="0" anchor="ctr"/>
-          <a:lstStyle/>
-          <a:p>
-            <a:pPr algn="ctr"/>
-          </a:p>
-        </p:txBody>
       </p:sp>
       <p:pic>
         <p:nvPicPr>
@@ -11949,7 +11852,7 @@
           <p:nvPr/>
         </p:nvPicPr>
         <p:blipFill>
-          <a:blip r:embed="rId2"/>
+          <a:blip ns2:embed="rId2"/>
           <a:stretch>
             <a:fillRect/>
           </a:stretch>
@@ -12830,7 +12733,7 @@
 </file>
 
 <file path=ppt/slides/slide19.xml><?xml version="1.0" encoding="utf-8"?>
-<p:sld xmlns:a="http://schemas.openxmlformats.org/drawingml/2006/main" xmlns:p="http://schemas.openxmlformats.org/presentationml/2006/main" xmlns:r="http://schemas.openxmlformats.org/officeDocument/2006/relationships">
+<p:sld xmlns:a="http://schemas.openxmlformats.org/drawingml/2006/main" xmlns:ns2="http://schemas.openxmlformats.org/officeDocument/2006/relationships" xmlns:p="http://schemas.openxmlformats.org/presentationml/2006/main">
   <p:cSld>
     <p:spTree>
       <p:nvGrpSpPr>
@@ -12874,13 +12777,6 @@
             <a:schemeClr val="lt1"/>
           </a:fontRef>
         </p:style>
-        <p:txBody>
-          <a:bodyPr rtlCol="0" anchor="ctr"/>
-          <a:lstStyle/>
-          <a:p>
-            <a:pPr algn="ctr"/>
-          </a:p>
-        </p:txBody>
       </p:sp>
       <p:pic>
         <p:nvPicPr>
@@ -12891,7 +12787,7 @@
           <p:nvPr/>
         </p:nvPicPr>
         <p:blipFill>
-          <a:blip r:embed="rId2"/>
+          <a:blip ns2:embed="rId2"/>
           <a:stretch>
             <a:fillRect/>
           </a:stretch>
@@ -13515,7 +13411,7 @@
 </file>
 
 <file path=ppt/slides/slide2.xml><?xml version="1.0" encoding="utf-8"?>
-<p:sld xmlns:a="http://schemas.openxmlformats.org/drawingml/2006/main" xmlns:p="http://schemas.openxmlformats.org/presentationml/2006/main" xmlns:r="http://schemas.openxmlformats.org/officeDocument/2006/relationships">
+<p:sld xmlns:a="http://schemas.openxmlformats.org/drawingml/2006/main" xmlns:ns2="http://schemas.openxmlformats.org/officeDocument/2006/relationships" xmlns:p="http://schemas.openxmlformats.org/presentationml/2006/main">
   <p:cSld>
     <p:spTree>
       <p:nvGrpSpPr>
@@ -13559,13 +13455,6 @@
             <a:schemeClr val="lt1"/>
           </a:fontRef>
         </p:style>
-        <p:txBody>
-          <a:bodyPr rtlCol="0" anchor="ctr"/>
-          <a:lstStyle/>
-          <a:p>
-            <a:pPr algn="ctr"/>
-          </a:p>
-        </p:txBody>
       </p:sp>
       <p:pic>
         <p:nvPicPr>
@@ -13576,7 +13465,7 @@
           <p:nvPr/>
         </p:nvPicPr>
         <p:blipFill>
-          <a:blip r:embed="rId2"/>
+          <a:blip ns2:embed="rId2"/>
           <a:stretch>
             <a:fillRect/>
           </a:stretch>
@@ -13829,7 +13718,7 @@
           <p:nvPr/>
         </p:nvPicPr>
         <p:blipFill>
-          <a:blip r:embed="rId3"/>
+          <a:blip ns2:embed="rId3"/>
           <a:stretch>
             <a:fillRect/>
           </a:stretch>
@@ -14331,7 +14220,7 @@
 </file>
 
 <file path=ppt/slides/slide20.xml><?xml version="1.0" encoding="utf-8"?>
-<p:sld xmlns:a="http://schemas.openxmlformats.org/drawingml/2006/main" xmlns:p="http://schemas.openxmlformats.org/presentationml/2006/main" xmlns:r="http://schemas.openxmlformats.org/officeDocument/2006/relationships">
+<p:sld xmlns:a="http://schemas.openxmlformats.org/drawingml/2006/main" xmlns:ns2="http://schemas.openxmlformats.org/officeDocument/2006/relationships" xmlns:p="http://schemas.openxmlformats.org/presentationml/2006/main">
   <p:cSld>
     <p:spTree>
       <p:nvGrpSpPr>
@@ -14375,13 +14264,6 @@
             <a:schemeClr val="lt1"/>
           </a:fontRef>
         </p:style>
-        <p:txBody>
-          <a:bodyPr rtlCol="0" anchor="ctr"/>
-          <a:lstStyle/>
-          <a:p>
-            <a:pPr algn="ctr"/>
-          </a:p>
-        </p:txBody>
       </p:sp>
       <p:pic>
         <p:nvPicPr>
@@ -14392,7 +14274,7 @@
           <p:nvPr/>
         </p:nvPicPr>
         <p:blipFill>
-          <a:blip r:embed="rId2"/>
+          <a:blip ns2:embed="rId2"/>
           <a:stretch>
             <a:fillRect/>
           </a:stretch>
@@ -15073,7 +14955,7 @@
 </file>
 
 <file path=ppt/slides/slide21.xml><?xml version="1.0" encoding="utf-8"?>
-<p:sld xmlns:a="http://schemas.openxmlformats.org/drawingml/2006/main" xmlns:p="http://schemas.openxmlformats.org/presentationml/2006/main" xmlns:r="http://schemas.openxmlformats.org/officeDocument/2006/relationships">
+<p:sld xmlns:a="http://schemas.openxmlformats.org/drawingml/2006/main" xmlns:ns2="http://schemas.openxmlformats.org/officeDocument/2006/relationships" xmlns:p="http://schemas.openxmlformats.org/presentationml/2006/main">
   <p:cSld>
     <p:spTree>
       <p:nvGrpSpPr>
@@ -15091,7 +14973,7 @@
           <p:nvPr/>
         </p:nvPicPr>
         <p:blipFill>
-          <a:blip r:embed="rId2"/>
+          <a:blip ns2:embed="rId2"/>
           <a:stretch>
             <a:fillRect/>
           </a:stretch>
@@ -15141,13 +15023,6 @@
             <a:schemeClr val="lt1"/>
           </a:fontRef>
         </p:style>
-        <p:txBody>
-          <a:bodyPr rtlCol="0" anchor="ctr"/>
-          <a:lstStyle/>
-          <a:p>
-            <a:pPr algn="ctr"/>
-          </a:p>
-        </p:txBody>
       </p:sp>
       <p:sp>
         <p:nvSpPr>
@@ -15246,7 +15121,7 @@
 </file>
 
 <file path=ppt/slides/slide3.xml><?xml version="1.0" encoding="utf-8"?>
-<p:sld xmlns:a="http://schemas.openxmlformats.org/drawingml/2006/main" xmlns:p="http://schemas.openxmlformats.org/presentationml/2006/main" xmlns:r="http://schemas.openxmlformats.org/officeDocument/2006/relationships">
+<p:sld xmlns:a="http://schemas.openxmlformats.org/drawingml/2006/main" xmlns:ns2="http://schemas.openxmlformats.org/officeDocument/2006/relationships" xmlns:p="http://schemas.openxmlformats.org/presentationml/2006/main">
   <p:cSld>
     <p:spTree>
       <p:nvGrpSpPr>
@@ -15290,13 +15165,6 @@
             <a:schemeClr val="lt1"/>
           </a:fontRef>
         </p:style>
-        <p:txBody>
-          <a:bodyPr rtlCol="0" anchor="ctr"/>
-          <a:lstStyle/>
-          <a:p>
-            <a:pPr algn="ctr"/>
-          </a:p>
-        </p:txBody>
       </p:sp>
       <p:pic>
         <p:nvPicPr>
@@ -15307,7 +15175,7 @@
           <p:nvPr/>
         </p:nvPicPr>
         <p:blipFill>
-          <a:blip r:embed="rId2"/>
+          <a:blip ns2:embed="rId2"/>
           <a:stretch>
             <a:fillRect/>
           </a:stretch>
@@ -16559,7 +16427,7 @@
 </file>
 
 <file path=ppt/slides/slide4.xml><?xml version="1.0" encoding="utf-8"?>
-<p:sld xmlns:a="http://schemas.openxmlformats.org/drawingml/2006/main" xmlns:p="http://schemas.openxmlformats.org/presentationml/2006/main" xmlns:r="http://schemas.openxmlformats.org/officeDocument/2006/relationships">
+<p:sld xmlns:a="http://schemas.openxmlformats.org/drawingml/2006/main" xmlns:ns2="http://schemas.openxmlformats.org/officeDocument/2006/relationships" xmlns:p="http://schemas.openxmlformats.org/presentationml/2006/main">
   <p:cSld>
     <p:spTree>
       <p:nvGrpSpPr>
@@ -16603,13 +16471,6 @@
             <a:schemeClr val="lt1"/>
           </a:fontRef>
         </p:style>
-        <p:txBody>
-          <a:bodyPr rtlCol="0" anchor="ctr"/>
-          <a:lstStyle/>
-          <a:p>
-            <a:pPr algn="ctr"/>
-          </a:p>
-        </p:txBody>
       </p:sp>
       <p:pic>
         <p:nvPicPr>
@@ -16620,7 +16481,7 @@
           <p:nvPr/>
         </p:nvPicPr>
         <p:blipFill>
-          <a:blip r:embed="rId2"/>
+          <a:blip ns2:embed="rId2"/>
           <a:stretch>
             <a:fillRect/>
           </a:stretch>
@@ -17397,7 +17258,7 @@
 </file>
 
 <file path=ppt/slides/slide5.xml><?xml version="1.0" encoding="utf-8"?>
-<p:sld xmlns:a="http://schemas.openxmlformats.org/drawingml/2006/main" xmlns:p="http://schemas.openxmlformats.org/presentationml/2006/main" xmlns:r="http://schemas.openxmlformats.org/officeDocument/2006/relationships">
+<p:sld xmlns:a="http://schemas.openxmlformats.org/drawingml/2006/main" xmlns:ns2="http://schemas.openxmlformats.org/officeDocument/2006/relationships" xmlns:p="http://schemas.openxmlformats.org/presentationml/2006/main">
   <p:cSld>
     <p:spTree>
       <p:nvGrpSpPr>
@@ -17441,13 +17302,6 @@
             <a:schemeClr val="lt1"/>
           </a:fontRef>
         </p:style>
-        <p:txBody>
-          <a:bodyPr rtlCol="0" anchor="ctr"/>
-          <a:lstStyle/>
-          <a:p>
-            <a:pPr algn="ctr"/>
-          </a:p>
-        </p:txBody>
       </p:sp>
       <p:pic>
         <p:nvPicPr>
@@ -17458,7 +17312,7 @@
           <p:nvPr/>
         </p:nvPicPr>
         <p:blipFill>
-          <a:blip r:embed="rId2"/>
+          <a:blip ns2:embed="rId2"/>
           <a:stretch>
             <a:fillRect/>
           </a:stretch>
@@ -17570,7 +17424,7 @@
           <p:nvPr/>
         </p:nvPicPr>
         <p:blipFill>
-          <a:blip r:embed="rId3"/>
+          <a:blip ns2:embed="rId3"/>
           <a:stretch>
             <a:fillRect/>
           </a:stretch>
@@ -18512,7 +18366,7 @@
 </file>
 
 <file path=ppt/slides/slide6.xml><?xml version="1.0" encoding="utf-8"?>
-<p:sld xmlns:a="http://schemas.openxmlformats.org/drawingml/2006/main" xmlns:p="http://schemas.openxmlformats.org/presentationml/2006/main" xmlns:r="http://schemas.openxmlformats.org/officeDocument/2006/relationships">
+<p:sld xmlns:a="http://schemas.openxmlformats.org/drawingml/2006/main" xmlns:ns2="http://schemas.openxmlformats.org/officeDocument/2006/relationships" xmlns:p="http://schemas.openxmlformats.org/presentationml/2006/main">
   <p:cSld>
     <p:spTree>
       <p:nvGrpSpPr>
@@ -18556,13 +18410,6 @@
             <a:schemeClr val="lt1"/>
           </a:fontRef>
         </p:style>
-        <p:txBody>
-          <a:bodyPr rtlCol="0" anchor="ctr"/>
-          <a:lstStyle/>
-          <a:p>
-            <a:pPr algn="ctr"/>
-          </a:p>
-        </p:txBody>
       </p:sp>
       <p:pic>
         <p:nvPicPr>
@@ -18573,7 +18420,7 @@
           <p:nvPr/>
         </p:nvPicPr>
         <p:blipFill>
-          <a:blip r:embed="rId2"/>
+          <a:blip ns2:embed="rId2"/>
           <a:stretch>
             <a:fillRect/>
           </a:stretch>
@@ -20097,7 +19944,7 @@
 </file>
 
 <file path=ppt/slides/slide7.xml><?xml version="1.0" encoding="utf-8"?>
-<p:sld xmlns:a="http://schemas.openxmlformats.org/drawingml/2006/main" xmlns:p="http://schemas.openxmlformats.org/presentationml/2006/main" xmlns:r="http://schemas.openxmlformats.org/officeDocument/2006/relationships">
+<p:sld xmlns:a="http://schemas.openxmlformats.org/drawingml/2006/main" xmlns:ns2="http://schemas.openxmlformats.org/officeDocument/2006/relationships" xmlns:p="http://schemas.openxmlformats.org/presentationml/2006/main">
   <p:cSld>
     <p:spTree>
       <p:nvGrpSpPr>
@@ -20141,13 +19988,6 @@
             <a:schemeClr val="lt1"/>
           </a:fontRef>
         </p:style>
-        <p:txBody>
-          <a:bodyPr rtlCol="0" anchor="ctr"/>
-          <a:lstStyle/>
-          <a:p>
-            <a:pPr algn="ctr"/>
-          </a:p>
-        </p:txBody>
       </p:sp>
       <p:pic>
         <p:nvPicPr>
@@ -20158,7 +19998,7 @@
           <p:nvPr/>
         </p:nvPicPr>
         <p:blipFill>
-          <a:blip r:embed="rId2"/>
+          <a:blip ns2:embed="rId2"/>
           <a:stretch>
             <a:fillRect/>
           </a:stretch>
@@ -20270,7 +20110,7 @@
           <p:nvPr/>
         </p:nvPicPr>
         <p:blipFill>
-          <a:blip r:embed="rId3"/>
+          <a:blip ns2:embed="rId3"/>
           <a:stretch>
             <a:fillRect/>
           </a:stretch>
@@ -20719,33 +20559,6 @@
           </a:prstGeom>
           <a:noFill/>
         </p:spPr>
-        <p:txBody>
-          <a:bodyPr wrap="square" lIns="0" rIns="0" tIns="0" bIns="0">
-            <a:spAutoFit/>
-          </a:bodyPr>
-          <a:lstStyle/>
-          <a:p>
-            <a:pPr algn="r">
-              <a:spcBef>
-                <a:spcPts val="0"/>
-              </a:spcBef>
-              <a:spcAft>
-                <a:spcPts val="0"/>
-              </a:spcAft>
-            </a:pPr>
-            <a:r>
-              <a:rPr sz="2050" b="1">
-                <a:solidFill>
-                  <a:srgbClr val="4E4E4E"/>
-                </a:solidFill>
-                <a:latin typeface="Times New Roman"/>
-                <a:ea typeface="Times New Roman"/>
-                <a:cs typeface="Times New Roman"/>
-              </a:rPr>
-              <a:t/>
-            </a:r>
-          </a:p>
-        </p:txBody>
       </p:sp>
       <p:sp>
         <p:nvSpPr>
@@ -20979,7 +20792,7 @@
 </file>
 
 <file path=ppt/slides/slide8.xml><?xml version="1.0" encoding="utf-8"?>
-<p:sld xmlns:a="http://schemas.openxmlformats.org/drawingml/2006/main" xmlns:p="http://schemas.openxmlformats.org/presentationml/2006/main" xmlns:r="http://schemas.openxmlformats.org/officeDocument/2006/relationships">
+<p:sld xmlns:a="http://schemas.openxmlformats.org/drawingml/2006/main" xmlns:ns2="http://schemas.openxmlformats.org/officeDocument/2006/relationships" xmlns:p="http://schemas.openxmlformats.org/presentationml/2006/main">
   <p:cSld>
     <p:spTree>
       <p:nvGrpSpPr>
@@ -21023,13 +20836,6 @@
             <a:schemeClr val="lt1"/>
           </a:fontRef>
         </p:style>
-        <p:txBody>
-          <a:bodyPr rtlCol="0" anchor="ctr"/>
-          <a:lstStyle/>
-          <a:p>
-            <a:pPr algn="ctr"/>
-          </a:p>
-        </p:txBody>
       </p:sp>
       <p:pic>
         <p:nvPicPr>
@@ -21040,7 +20846,7 @@
           <p:nvPr/>
         </p:nvPicPr>
         <p:blipFill>
-          <a:blip r:embed="rId2"/>
+          <a:blip ns2:embed="rId2"/>
           <a:stretch>
             <a:fillRect/>
           </a:stretch>
@@ -22663,7 +22469,7 @@
 </file>
 
 <file path=ppt/slides/slide9.xml><?xml version="1.0" encoding="utf-8"?>
-<p:sld xmlns:a="http://schemas.openxmlformats.org/drawingml/2006/main" xmlns:p="http://schemas.openxmlformats.org/presentationml/2006/main" xmlns:r="http://schemas.openxmlformats.org/officeDocument/2006/relationships">
+<p:sld xmlns:a="http://schemas.openxmlformats.org/drawingml/2006/main" xmlns:ns2="http://schemas.openxmlformats.org/officeDocument/2006/relationships" xmlns:p="http://schemas.openxmlformats.org/presentationml/2006/main">
   <p:cSld>
     <p:spTree>
       <p:nvGrpSpPr>
@@ -22707,13 +22513,6 @@
             <a:schemeClr val="lt1"/>
           </a:fontRef>
         </p:style>
-        <p:txBody>
-          <a:bodyPr rtlCol="0" anchor="ctr"/>
-          <a:lstStyle/>
-          <a:p>
-            <a:pPr algn="ctr"/>
-          </a:p>
-        </p:txBody>
       </p:sp>
       <p:pic>
         <p:nvPicPr>
@@ -22724,7 +22523,7 @@
           <p:nvPr/>
         </p:nvPicPr>
         <p:blipFill>
-          <a:blip r:embed="rId2"/>
+          <a:blip ns2:embed="rId2"/>
           <a:stretch>
             <a:fillRect/>
           </a:stretch>

--- a/skills/uav-paper-report/assets/examples/uav-multi-quad-cbf-report.pptx
+++ b/skills/uav-paper-report/assets/examples/uav-multi-quad-cbf-report.pptx
@@ -3521,7 +3521,7 @@
               </a:spcAft>
             </a:pPr>
             <a:r>
-              <a:rPr sz="1850" b="1">
+              <a:rPr sz="1820" b="1">
                 <a:solidFill>
                   <a:srgbClr val="000000"/>
                 </a:solidFill>
@@ -3532,7 +3532,7 @@
               <a:t>● 为了避免在优化中嵌套求最小距离，论文用</a:t>
             </a:r>
             <a:r>
-              <a:rPr sz="1850" b="1">
+              <a:rPr sz="1820" b="1">
                 <a:solidFill>
                   <a:srgbClr val="DC0000"/>
                 </a:solidFill>
@@ -3543,7 +3543,7 @@
               <a:t>Duality</a:t>
             </a:r>
             <a:r>
-              <a:rPr sz="1850" b="1">
+              <a:rPr sz="1820" b="1">
                 <a:solidFill>
                   <a:srgbClr val="000000"/>
                 </a:solidFill>
@@ -3554,7 +3554,7 @@
               <a:t> theorem推导等价</a:t>
             </a:r>
             <a:r>
-              <a:rPr sz="1850" b="1">
+              <a:rPr sz="1820" b="1">
                 <a:solidFill>
                   <a:srgbClr val="DC0000"/>
                 </a:solidFill>
@@ -3565,7 +3565,7 @@
               <a:t>CBF</a:t>
             </a:r>
             <a:r>
-              <a:rPr sz="1850" b="1">
+              <a:rPr sz="1820" b="1">
                 <a:solidFill>
                   <a:srgbClr val="000000"/>
                 </a:solidFill>
@@ -4260,7 +4260,7 @@
               </a:spcAft>
             </a:pPr>
             <a:r>
-              <a:rPr sz="2080" b="0">
+              <a:rPr sz="1620" b="0">
                 <a:solidFill>
                   <a:srgbClr val="000000"/>
                 </a:solidFill>
@@ -4271,7 +4271,7 @@
               <a:t>-λ</a:t>
             </a:r>
             <a:r>
-              <a:rPr sz="1497" b="0" baseline="-25000">
+              <a:rPr sz="1620" b="0" baseline="-25000">
                 <a:solidFill>
                   <a:srgbClr val="000000"/>
                 </a:solidFill>
@@ -4282,7 +4282,7 @@
               <a:t>i</a:t>
             </a:r>
             <a:r>
-              <a:rPr sz="1497" b="0" baseline="30000">
+              <a:rPr sz="1620" b="0" baseline="30000">
                 <a:solidFill>
                   <a:srgbClr val="000000"/>
                 </a:solidFill>
@@ -4293,7 +4293,7 @@
               <a:t>obs</a:t>
             </a:r>
             <a:r>
-              <a:rPr sz="2080" b="0">
+              <a:rPr sz="1620" b="0">
                 <a:solidFill>
                   <a:srgbClr val="000000"/>
                 </a:solidFill>
@@ -4304,7 +4304,7 @@
               <a:t>B</a:t>
             </a:r>
             <a:r>
-              <a:rPr sz="1497" b="0" baseline="-25000">
+              <a:rPr sz="1620" b="0" baseline="-25000">
                 <a:solidFill>
                   <a:srgbClr val="000000"/>
                 </a:solidFill>
@@ -4315,7 +4315,7 @@
               <a:t>obs</a:t>
             </a:r>
             <a:r>
-              <a:rPr sz="2080" b="0">
+              <a:rPr sz="1620" b="0">
                 <a:solidFill>
                   <a:srgbClr val="000000"/>
                 </a:solidFill>
@@ -4326,7 +4326,7 @@
               <a:t> - λ</a:t>
             </a:r>
             <a:r>
-              <a:rPr sz="1497" b="0" baseline="-25000">
+              <a:rPr sz="1620" b="0" baseline="-25000">
                 <a:solidFill>
                   <a:srgbClr val="000000"/>
                 </a:solidFill>
@@ -4337,7 +4337,7 @@
               <a:t>i</a:t>
             </a:r>
             <a:r>
-              <a:rPr sz="1497" b="0" baseline="30000">
+              <a:rPr sz="1620" b="0" baseline="30000">
                 <a:solidFill>
                   <a:srgbClr val="000000"/>
                 </a:solidFill>
@@ -4348,7 +4348,7 @@
               <a:t>L</a:t>
             </a:r>
             <a:r>
-              <a:rPr sz="2080" b="0">
+              <a:rPr sz="1620" b="0">
                 <a:solidFill>
                   <a:srgbClr val="000000"/>
                 </a:solidFill>
@@ -4359,7 +4359,7 @@
               <a:t>B</a:t>
             </a:r>
             <a:r>
-              <a:rPr sz="1497" b="0" baseline="-25000">
+              <a:rPr sz="1620" b="0" baseline="-25000">
                 <a:solidFill>
                   <a:srgbClr val="000000"/>
                 </a:solidFill>
@@ -4370,7 +4370,7 @@
               <a:t>L</a:t>
             </a:r>
             <a:r>
-              <a:rPr sz="2080" b="0">
+              <a:rPr sz="1620" b="0">
                 <a:solidFill>
                   <a:srgbClr val="000000"/>
                 </a:solidFill>
@@ -4381,7 +4381,7 @@
               <a:t>(X</a:t>
             </a:r>
             <a:r>
-              <a:rPr sz="1497" b="0" baseline="-25000">
+              <a:rPr sz="1620" b="0" baseline="-25000">
                 <a:solidFill>
                   <a:srgbClr val="000000"/>
                 </a:solidFill>
@@ -4392,7 +4392,7 @@
               <a:t>i+1</a:t>
             </a:r>
             <a:r>
-              <a:rPr sz="2080" b="0">
+              <a:rPr sz="1620" b="0">
                 <a:solidFill>
                   <a:srgbClr val="000000"/>
                 </a:solidFill>
@@ -4403,7 +4403,7 @@
               <a:t>) ≥ γ</a:t>
             </a:r>
             <a:r>
-              <a:rPr sz="1497" b="0" baseline="-25000">
+              <a:rPr sz="1620" b="0" baseline="-25000">
                 <a:solidFill>
                   <a:srgbClr val="000000"/>
                 </a:solidFill>
@@ -4414,7 +4414,7 @@
               <a:t>i</a:t>
             </a:r>
             <a:r>
-              <a:rPr sz="2080" b="0">
+              <a:rPr sz="1620" b="0">
                 <a:solidFill>
                   <a:srgbClr val="000000"/>
                 </a:solidFill>
@@ -4425,7 +4425,7 @@
               <a:t>h(X</a:t>
             </a:r>
             <a:r>
-              <a:rPr sz="1497" b="0" baseline="-25000">
+              <a:rPr sz="1620" b="0" baseline="-25000">
                 <a:solidFill>
                   <a:srgbClr val="000000"/>
                 </a:solidFill>
@@ -4436,7 +4436,7 @@
               <a:t>i</a:t>
             </a:r>
             <a:r>
-              <a:rPr sz="2080" b="0">
+              <a:rPr sz="1620" b="0">
                 <a:solidFill>
                   <a:srgbClr val="000000"/>
                 </a:solidFill>
@@ -5144,7 +5144,7 @@
               </a:spcAft>
             </a:pPr>
             <a:r>
-              <a:rPr sz="1810" b="1">
+              <a:rPr sz="1820" b="1">
                 <a:solidFill>
                   <a:srgbClr val="000000"/>
                 </a:solidFill>
@@ -5155,7 +5155,7 @@
               <a:t>● 指数</a:t>
             </a:r>
             <a:r>
-              <a:rPr sz="1810" b="1">
+              <a:rPr sz="1820" b="1">
                 <a:solidFill>
                   <a:srgbClr val="DC0000"/>
                 </a:solidFill>
@@ -5166,7 +5166,7 @@
               <a:t>CBF</a:t>
             </a:r>
             <a:r>
-              <a:rPr sz="1810" b="1">
+              <a:rPr sz="1820" b="1">
                 <a:solidFill>
                   <a:srgbClr val="000000"/>
                 </a:solidFill>
@@ -5190,7 +5190,7 @@
               </a:spcAft>
             </a:pPr>
             <a:r>
-              <a:rPr sz="1710" b="0">
+              <a:rPr sz="1680" b="0">
                 <a:solidFill>
                   <a:srgbClr val="000000"/>
                 </a:solidFill>
@@ -5313,7 +5313,7 @@
               </a:spcAft>
             </a:pPr>
             <a:r>
-              <a:rPr sz="2200" b="0">
+              <a:rPr sz="1620" b="0">
                 <a:solidFill>
                   <a:srgbClr val="000000"/>
                 </a:solidFill>
@@ -5324,7 +5324,7 @@
               <a:t>-λ</a:t>
             </a:r>
             <a:r>
-              <a:rPr sz="1584" b="0" baseline="-25000">
+              <a:rPr sz="1620" b="0" baseline="-25000">
                 <a:solidFill>
                   <a:srgbClr val="000000"/>
                 </a:solidFill>
@@ -5335,7 +5335,7 @@
               <a:t>i</a:t>
             </a:r>
             <a:r>
-              <a:rPr sz="1584" b="0" baseline="30000">
+              <a:rPr sz="1620" b="0" baseline="30000">
                 <a:solidFill>
                   <a:srgbClr val="000000"/>
                 </a:solidFill>
@@ -5346,7 +5346,7 @@
               <a:t>obs</a:t>
             </a:r>
             <a:r>
-              <a:rPr sz="2200" b="0">
+              <a:rPr sz="1620" b="0">
                 <a:solidFill>
                   <a:srgbClr val="000000"/>
                 </a:solidFill>
@@ -5357,7 +5357,7 @@
               <a:t>B</a:t>
             </a:r>
             <a:r>
-              <a:rPr sz="1584" b="0" baseline="-25000">
+              <a:rPr sz="1620" b="0" baseline="-25000">
                 <a:solidFill>
                   <a:srgbClr val="000000"/>
                 </a:solidFill>
@@ -5368,7 +5368,7 @@
               <a:t>obs</a:t>
             </a:r>
             <a:r>
-              <a:rPr sz="2200" b="0">
+              <a:rPr sz="1620" b="0">
                 <a:solidFill>
                   <a:srgbClr val="000000"/>
                 </a:solidFill>
@@ -5379,7 +5379,7 @@
               <a:t> - λ</a:t>
             </a:r>
             <a:r>
-              <a:rPr sz="1584" b="0" baseline="-25000">
+              <a:rPr sz="1620" b="0" baseline="-25000">
                 <a:solidFill>
                   <a:srgbClr val="000000"/>
                 </a:solidFill>
@@ -5390,7 +5390,7 @@
               <a:t>i</a:t>
             </a:r>
             <a:r>
-              <a:rPr sz="1584" b="0" baseline="30000">
+              <a:rPr sz="1620" b="0" baseline="30000">
                 <a:solidFill>
                   <a:srgbClr val="000000"/>
                 </a:solidFill>
@@ -5401,7 +5401,7 @@
               <a:t>L</a:t>
             </a:r>
             <a:r>
-              <a:rPr sz="2200" b="0">
+              <a:rPr sz="1620" b="0">
                 <a:solidFill>
                   <a:srgbClr val="000000"/>
                 </a:solidFill>
@@ -5412,7 +5412,7 @@
               <a:t>B</a:t>
             </a:r>
             <a:r>
-              <a:rPr sz="1584" b="0" baseline="-25000">
+              <a:rPr sz="1620" b="0" baseline="-25000">
                 <a:solidFill>
                   <a:srgbClr val="000000"/>
                 </a:solidFill>
@@ -5423,7 +5423,7 @@
               <a:t>L</a:t>
             </a:r>
             <a:r>
-              <a:rPr sz="2200" b="0">
+              <a:rPr sz="1620" b="0">
                 <a:solidFill>
                   <a:srgbClr val="000000"/>
                 </a:solidFill>
@@ -5434,7 +5434,7 @@
               <a:t>(X</a:t>
             </a:r>
             <a:r>
-              <a:rPr sz="1584" b="0" baseline="-25000">
+              <a:rPr sz="1620" b="0" baseline="-25000">
                 <a:solidFill>
                   <a:srgbClr val="000000"/>
                 </a:solidFill>
@@ -5445,7 +5445,7 @@
               <a:t>i+1</a:t>
             </a:r>
             <a:r>
-              <a:rPr sz="2200" b="0">
+              <a:rPr sz="1620" b="0">
                 <a:solidFill>
                   <a:srgbClr val="000000"/>
                 </a:solidFill>
@@ -5456,7 +5456,7 @@
               <a:t>) ≥ α</a:t>
             </a:r>
             <a:r>
-              <a:rPr sz="1584" b="0" baseline="-25000">
+              <a:rPr sz="1620" b="0" baseline="-25000">
                 <a:solidFill>
                   <a:srgbClr val="000000"/>
                 </a:solidFill>
@@ -5467,7 +5467,7 @@
               <a:t>i</a:t>
             </a:r>
             <a:r>
-              <a:rPr sz="2200" b="0">
+              <a:rPr sz="1620" b="0">
                 <a:solidFill>
                   <a:srgbClr val="000000"/>
                 </a:solidFill>
@@ -5478,7 +5478,7 @@
               <a:t> Π</a:t>
             </a:r>
             <a:r>
-              <a:rPr sz="1584" b="0" baseline="-25000">
+              <a:rPr sz="1620" b="0" baseline="-25000">
                 <a:solidFill>
                   <a:srgbClr val="000000"/>
                 </a:solidFill>
@@ -5489,7 +5489,7 @@
               <a:t>j=0</a:t>
             </a:r>
             <a:r>
-              <a:rPr sz="1584" b="0" baseline="30000">
+              <a:rPr sz="1620" b="0" baseline="30000">
                 <a:solidFill>
                   <a:srgbClr val="000000"/>
                 </a:solidFill>
@@ -5500,7 +5500,7 @@
               <a:t>i</a:t>
             </a:r>
             <a:r>
-              <a:rPr sz="2200" b="0">
+              <a:rPr sz="1620" b="0">
                 <a:solidFill>
                   <a:srgbClr val="000000"/>
                 </a:solidFill>
@@ -5511,7 +5511,7 @@
               <a:t>γ</a:t>
             </a:r>
             <a:r>
-              <a:rPr sz="1584" b="0" baseline="-25000">
+              <a:rPr sz="1620" b="0" baseline="-25000">
                 <a:solidFill>
                   <a:srgbClr val="000000"/>
                 </a:solidFill>
@@ -5522,7 +5522,7 @@
               <a:t>j</a:t>
             </a:r>
             <a:r>
-              <a:rPr sz="2200" b="0">
+              <a:rPr sz="1620" b="0">
                 <a:solidFill>
                   <a:srgbClr val="000000"/>
                 </a:solidFill>
@@ -5533,7 +5533,7 @@
               <a:t>h(X</a:t>
             </a:r>
             <a:r>
-              <a:rPr sz="1584" b="0" baseline="-25000">
+              <a:rPr sz="1620" b="0" baseline="-25000">
                 <a:solidFill>
                   <a:srgbClr val="000000"/>
                 </a:solidFill>
@@ -5544,7 +5544,7 @@
               <a:t>0</a:t>
             </a:r>
             <a:r>
-              <a:rPr sz="2200" b="0">
+              <a:rPr sz="1620" b="0">
                 <a:solidFill>
                   <a:srgbClr val="000000"/>
                 </a:solidFill>
@@ -6385,7 +6385,7 @@
               </a:spcAft>
             </a:pPr>
             <a:r>
-              <a:rPr sz="1850" b="1">
+              <a:rPr sz="1820" b="1">
                 <a:solidFill>
                   <a:srgbClr val="000000"/>
                 </a:solidFill>
@@ -6396,7 +6396,7 @@
               <a:t>● 在线阶段以当前状态为初值，反复求解带</a:t>
             </a:r>
             <a:r>
-              <a:rPr sz="1850" b="1">
+              <a:rPr sz="1820" b="1">
                 <a:solidFill>
                   <a:srgbClr val="DC0000"/>
                 </a:solidFill>
@@ -6407,7 +6407,7 @@
               <a:t>CBF</a:t>
             </a:r>
             <a:r>
-              <a:rPr sz="1850" b="1">
+              <a:rPr sz="1820" b="1">
                 <a:solidFill>
                   <a:srgbClr val="000000"/>
                 </a:solidFill>
@@ -7695,7 +7695,7 @@
               </a:spcAft>
             </a:pPr>
             <a:r>
-              <a:rPr sz="1780" b="1">
+              <a:rPr sz="1820" b="1">
                 <a:solidFill>
                   <a:srgbClr val="000000"/>
                 </a:solidFill>
@@ -7706,7 +7706,7 @@
               <a:t>● 实验采用RotorTM仿真和三机</a:t>
             </a:r>
             <a:r>
-              <a:rPr sz="1780" b="1">
+              <a:rPr sz="1820" b="1">
                 <a:solidFill>
                   <a:srgbClr val="DC0000"/>
                 </a:solidFill>
@@ -7717,7 +7717,7 @@
               <a:t>实机</a:t>
             </a:r>
             <a:r>
-              <a:rPr sz="1780" b="1">
+              <a:rPr sz="1820" b="1">
                 <a:solidFill>
                   <a:srgbClr val="000000"/>
                 </a:solidFill>
@@ -8478,15 +8478,15 @@
               </a:spcAft>
             </a:pPr>
             <a:r>
-              <a:rPr sz="1830" b="1">
-                <a:solidFill>
-                  <a:srgbClr val="000000"/>
-                </a:solidFill>
-                <a:latin typeface="Times New Roman"/>
-                <a:ea typeface="Times New Roman"/>
-                <a:cs typeface="Times New Roman"/>
-              </a:rPr>
-              <a:t>● 仿真环境包含多种窄通道、扭曲通道和随机障碍，用于测试规划器的局部几何适应能力。</a:t>
+              <a:rPr sz="1820" b="1">
+                <a:solidFill>
+                  <a:srgbClr val="000000"/>
+                </a:solidFill>
+                <a:latin typeface="Times New Roman"/>
+                <a:ea typeface="Times New Roman"/>
+                <a:cs typeface="Times New Roman"/>
+              </a:rPr>
+              <a:t>● 仿真环境包含多种窄通道、扭曲通道和随机障碍，评估规划器对局部几何变化的适应能力。</a:t>
             </a:r>
           </a:p>
         </p:txBody>
@@ -8549,7 +8549,7 @@
               </a:spcAft>
             </a:pPr>
             <a:r>
-              <a:rPr sz="1780" b="1">
+              <a:rPr sz="1820" b="1">
                 <a:solidFill>
                   <a:srgbClr val="000000"/>
                 </a:solidFill>
@@ -9627,7 +9627,7 @@
               </a:spcAft>
             </a:pPr>
             <a:r>
-              <a:rPr sz="1780" b="1">
+              <a:rPr sz="1820" b="1">
                 <a:solidFill>
                   <a:srgbClr val="000000"/>
                 </a:solidFill>
@@ -9638,7 +9638,7 @@
               <a:t>● 没有</a:t>
             </a:r>
             <a:r>
-              <a:rPr sz="1780" b="1">
+              <a:rPr sz="1820" b="1">
                 <a:solidFill>
                   <a:srgbClr val="DC0000"/>
                 </a:solidFill>
@@ -9649,7 +9649,7 @@
               <a:t>全局参考</a:t>
             </a:r>
             <a:r>
-              <a:rPr sz="1780" b="1">
+              <a:rPr sz="1820" b="1">
                 <a:solidFill>
                   <a:srgbClr val="000000"/>
                 </a:solidFill>
@@ -10498,7 +10498,7 @@
               </a:spcAft>
             </a:pPr>
             <a:r>
-              <a:rPr sz="1839" b="1">
+              <a:rPr sz="1820" b="1">
                 <a:solidFill>
                   <a:srgbClr val="000000"/>
                 </a:solidFill>
@@ -10509,7 +10509,7 @@
               <a:t>● </a:t>
             </a:r>
             <a:r>
-              <a:rPr sz="1839" b="1">
+              <a:rPr sz="1820" b="1">
                 <a:solidFill>
                   <a:srgbClr val="DC0000"/>
                 </a:solidFill>
@@ -10520,7 +10520,7 @@
               <a:t>实机</a:t>
             </a:r>
             <a:r>
-              <a:rPr sz="1839" b="1">
+              <a:rPr sz="1820" b="1">
                 <a:solidFill>
                   <a:srgbClr val="000000"/>
                 </a:solidFill>
@@ -10956,7 +10956,7 @@
               </a:spcAft>
             </a:pPr>
             <a:r>
-              <a:rPr sz="1780" b="1">
+              <a:rPr sz="1820" b="1">
                 <a:solidFill>
                   <a:srgbClr val="000000"/>
                 </a:solidFill>
@@ -10967,7 +10967,7 @@
               <a:t>● 仿真验证</a:t>
             </a:r>
             <a:r>
-              <a:rPr sz="1780" b="1">
+              <a:rPr sz="1820" b="1">
                 <a:solidFill>
                   <a:srgbClr val="DC0000"/>
                 </a:solidFill>
@@ -10978,7 +10978,7 @@
               <a:t>全局参考</a:t>
             </a:r>
             <a:r>
-              <a:rPr sz="1780" b="1">
+              <a:rPr sz="1820" b="1">
                 <a:solidFill>
                   <a:srgbClr val="000000"/>
                 </a:solidFill>
@@ -10989,7 +10989,7 @@
               <a:t> + </a:t>
             </a:r>
             <a:r>
-              <a:rPr sz="1780" b="1">
+              <a:rPr sz="1820" b="1">
                 <a:solidFill>
                   <a:srgbClr val="DC0000"/>
                 </a:solidFill>
@@ -11000,7 +11000,7 @@
               <a:t>CBF</a:t>
             </a:r>
             <a:r>
-              <a:rPr sz="1780" b="1">
+              <a:rPr sz="1820" b="1">
                 <a:solidFill>
                   <a:srgbClr val="000000"/>
                 </a:solidFill>
@@ -11011,7 +11011,7 @@
               <a:t>-</a:t>
             </a:r>
             <a:r>
-              <a:rPr sz="1780" b="1">
+              <a:rPr sz="1820" b="1">
                 <a:solidFill>
                   <a:srgbClr val="DC0000"/>
                 </a:solidFill>
@@ -11022,7 +11022,7 @@
               <a:t>MPC</a:t>
             </a:r>
             <a:r>
-              <a:rPr sz="1780" b="1">
+              <a:rPr sz="1820" b="1">
                 <a:solidFill>
                   <a:srgbClr val="000000"/>
                 </a:solidFill>
@@ -11183,7 +11183,7 @@
               </a:spcAft>
             </a:pPr>
             <a:r>
-              <a:rPr sz="1780" b="1">
+              <a:rPr sz="1820" b="1">
                 <a:solidFill>
                   <a:srgbClr val="000000"/>
                 </a:solidFill>
@@ -11194,7 +11194,7 @@
               <a:t>● </a:t>
             </a:r>
             <a:r>
-              <a:rPr sz="1780" b="1">
+              <a:rPr sz="1820" b="1">
                 <a:solidFill>
                   <a:srgbClr val="DC0000"/>
                 </a:solidFill>
@@ -11205,7 +11205,7 @@
               <a:t>实机</a:t>
             </a:r>
             <a:r>
-              <a:rPr sz="1780" b="1">
+              <a:rPr sz="1820" b="1">
                 <a:solidFill>
                   <a:srgbClr val="000000"/>
                 </a:solidFill>
@@ -11989,7 +11989,7 @@
               </a:spcAft>
             </a:pPr>
             <a:r>
-              <a:rPr sz="1880" b="1">
+              <a:rPr sz="1820" b="1">
                 <a:solidFill>
                   <a:srgbClr val="000000"/>
                 </a:solidFill>
@@ -12924,7 +12924,7 @@
               </a:spcAft>
             </a:pPr>
             <a:r>
-              <a:rPr sz="1830" b="1">
+              <a:rPr sz="1820" b="1">
                 <a:solidFill>
                   <a:srgbClr val="000000"/>
                 </a:solidFill>
@@ -12948,7 +12948,7 @@
               </a:spcAft>
             </a:pPr>
             <a:r>
-              <a:rPr sz="1730" b="0">
+              <a:rPr sz="1680" b="0">
                 <a:solidFill>
                   <a:srgbClr val="000000"/>
                 </a:solidFill>
@@ -13602,7 +13602,7 @@
               </a:spcAft>
             </a:pPr>
             <a:r>
-              <a:rPr sz="1810" b="1">
+              <a:rPr sz="1820" b="1">
                 <a:solidFill>
                   <a:srgbClr val="000000"/>
                 </a:solidFill>
@@ -13626,7 +13626,7 @@
               </a:spcAft>
             </a:pPr>
             <a:r>
-              <a:rPr sz="1710" b="0">
+              <a:rPr sz="1680" b="0">
                 <a:solidFill>
                   <a:srgbClr val="000000"/>
                 </a:solidFill>
@@ -13637,7 +13637,7 @@
               <a:t>• 系统包含四旋翼、缆绳和</a:t>
             </a:r>
             <a:r>
-              <a:rPr sz="1710" b="1">
+              <a:rPr sz="1680" b="1">
                 <a:solidFill>
                   <a:srgbClr val="DC0000"/>
                 </a:solidFill>
@@ -13648,7 +13648,7 @@
               <a:t>六自由度</a:t>
             </a:r>
             <a:r>
-              <a:rPr sz="1710" b="0">
+              <a:rPr sz="1680" b="0">
                 <a:solidFill>
                   <a:srgbClr val="000000"/>
                 </a:solidFill>
@@ -13672,7 +13672,7 @@
               </a:spcAft>
             </a:pPr>
             <a:r>
-              <a:rPr sz="1710" b="0">
+              <a:rPr sz="1680" b="0">
                 <a:solidFill>
                   <a:srgbClr val="000000"/>
                 </a:solidFill>
@@ -13696,7 +13696,7 @@
               </a:spcAft>
             </a:pPr>
             <a:r>
-              <a:rPr sz="1710" b="0">
+              <a:rPr sz="1680" b="0">
                 <a:solidFill>
                   <a:srgbClr val="000000"/>
                 </a:solidFill>
@@ -14865,7 +14865,7 @@
               </a:spcAft>
             </a:pPr>
             <a:r>
-              <a:rPr sz="1800" b="1">
+              <a:rPr sz="1820" b="1">
                 <a:solidFill>
                   <a:srgbClr val="000000"/>
                 </a:solidFill>
@@ -14876,7 +14876,7 @@
               <a:t>● 本文把协同搬运系统的几何外形和动力学耦合写入</a:t>
             </a:r>
             <a:r>
-              <a:rPr sz="1800" b="1">
+              <a:rPr sz="1820" b="1">
                 <a:solidFill>
                   <a:srgbClr val="DC0000"/>
                 </a:solidFill>
@@ -14887,7 +14887,7 @@
               <a:t>CBF</a:t>
             </a:r>
             <a:r>
-              <a:rPr sz="1800" b="1">
+              <a:rPr sz="1820" b="1">
                 <a:solidFill>
                   <a:srgbClr val="000000"/>
                 </a:solidFill>
@@ -14898,7 +14898,7 @@
               <a:t>-</a:t>
             </a:r>
             <a:r>
-              <a:rPr sz="1800" b="1">
+              <a:rPr sz="1820" b="1">
                 <a:solidFill>
                   <a:srgbClr val="DC0000"/>
                 </a:solidFill>
@@ -14909,7 +14909,7 @@
               <a:t>MPC</a:t>
             </a:r>
             <a:r>
-              <a:rPr sz="1800" b="1">
+              <a:rPr sz="1820" b="1">
                 <a:solidFill>
                   <a:srgbClr val="000000"/>
                 </a:solidFill>
@@ -14933,7 +14933,7 @@
               </a:spcAft>
             </a:pPr>
             <a:r>
-              <a:rPr sz="1700" b="0">
+              <a:rPr sz="1680" b="0">
                 <a:solidFill>
                   <a:srgbClr val="000000"/>
                 </a:solidFill>
@@ -15941,7 +15941,7 @@
               </a:spcAft>
             </a:pPr>
             <a:r>
-              <a:rPr sz="1720" b="0">
+              <a:rPr sz="1680" b="0">
                 <a:solidFill>
                   <a:srgbClr val="000000"/>
                 </a:solidFill>
@@ -15952,7 +15952,7 @@
               <a:t>• </a:t>
             </a:r>
             <a:r>
-              <a:rPr sz="1720" b="1">
+              <a:rPr sz="1680" b="1">
                 <a:solidFill>
                   <a:srgbClr val="DC0000"/>
                 </a:solidFill>
@@ -15963,7 +15963,7 @@
               <a:t>CBF</a:t>
             </a:r>
             <a:r>
-              <a:rPr sz="1720" b="0">
+              <a:rPr sz="1680" b="0">
                 <a:solidFill>
                   <a:srgbClr val="000000"/>
                 </a:solidFill>
@@ -15987,7 +15987,7 @@
               </a:spcAft>
             </a:pPr>
             <a:r>
-              <a:rPr sz="1720" b="0">
+              <a:rPr sz="1680" b="0">
                 <a:solidFill>
                   <a:srgbClr val="000000"/>
                 </a:solidFill>
@@ -15998,7 +15998,7 @@
               <a:t>• A* </a:t>
             </a:r>
             <a:r>
-              <a:rPr sz="1720" b="1">
+              <a:rPr sz="1680" b="1">
                 <a:solidFill>
                   <a:srgbClr val="DC0000"/>
                 </a:solidFill>
@@ -16009,7 +16009,7 @@
               <a:t>全局参考</a:t>
             </a:r>
             <a:r>
-              <a:rPr sz="1720" b="0">
+              <a:rPr sz="1680" b="0">
                 <a:solidFill>
                   <a:srgbClr val="000000"/>
                 </a:solidFill>
@@ -16618,7 +16618,7 @@
               </a:spcAft>
             </a:pPr>
             <a:r>
-              <a:rPr sz="1880" b="1">
+              <a:rPr sz="1820" b="1">
                 <a:solidFill>
                   <a:srgbClr val="000000"/>
                 </a:solidFill>
@@ -17473,7 +17473,7 @@
               </a:spcAft>
             </a:pPr>
             <a:r>
-              <a:rPr sz="1780" b="1">
+              <a:rPr sz="1820" b="1">
                 <a:solidFill>
                   <a:srgbClr val="000000"/>
                 </a:solidFill>
@@ -18557,7 +18557,7 @@
               </a:spcAft>
             </a:pPr>
             <a:r>
-              <a:rPr sz="1860" b="1">
+              <a:rPr sz="1820" b="1">
                 <a:solidFill>
                   <a:srgbClr val="000000"/>
                 </a:solidFill>
@@ -20159,7 +20159,7 @@
               </a:spcAft>
             </a:pPr>
             <a:r>
-              <a:rPr sz="1780" b="1">
+              <a:rPr sz="1820" b="1">
                 <a:solidFill>
                   <a:srgbClr val="000000"/>
                 </a:solidFill>
@@ -20170,7 +20170,7 @@
               <a:t>● 论文用</a:t>
             </a:r>
             <a:r>
-              <a:rPr sz="1780" b="1">
+              <a:rPr sz="1820" b="1">
                 <a:solidFill>
                   <a:srgbClr val="DC0000"/>
                 </a:solidFill>
@@ -20181,7 +20181,7 @@
               <a:t>convex polytopes</a:t>
             </a:r>
             <a:r>
-              <a:rPr sz="1780" b="1">
+              <a:rPr sz="1820" b="1">
                 <a:solidFill>
                   <a:srgbClr val="000000"/>
                 </a:solidFill>
@@ -20983,7 +20983,7 @@
               </a:spcAft>
             </a:pPr>
             <a:r>
-              <a:rPr sz="1860" b="1">
+              <a:rPr sz="1820" b="1">
                 <a:solidFill>
                   <a:srgbClr val="000000"/>
                 </a:solidFill>
@@ -22660,7 +22660,7 @@
               </a:spcAft>
             </a:pPr>
             <a:r>
-              <a:rPr sz="1830" b="1">
+              <a:rPr sz="1820" b="1">
                 <a:solidFill>
                   <a:srgbClr val="000000"/>
                 </a:solidFill>
@@ -22671,7 +22671,7 @@
               <a:t>● </a:t>
             </a:r>
             <a:r>
-              <a:rPr sz="1830" b="1">
+              <a:rPr sz="1820" b="1">
                 <a:solidFill>
                   <a:srgbClr val="DC0000"/>
                 </a:solidFill>
@@ -22682,7 +22682,7 @@
               <a:t>CBF</a:t>
             </a:r>
             <a:r>
-              <a:rPr sz="1830" b="1">
+              <a:rPr sz="1820" b="1">
                 <a:solidFill>
                   <a:srgbClr val="000000"/>
                 </a:solidFill>
@@ -22706,7 +22706,7 @@
               </a:spcAft>
             </a:pPr>
             <a:r>
-              <a:rPr sz="1730" b="0">
+              <a:rPr sz="1680" b="0">
                 <a:solidFill>
                   <a:srgbClr val="000000"/>
                 </a:solidFill>
@@ -23382,7 +23382,7 @@
               </a:spcAft>
             </a:pPr>
             <a:r>
-              <a:rPr sz="1600" b="0">
+              <a:rPr sz="1680" b="0">
                 <a:solidFill>
                   <a:srgbClr val="000000"/>
                 </a:solidFill>
@@ -23406,7 +23406,7 @@
               </a:spcAft>
             </a:pPr>
             <a:r>
-              <a:rPr sz="1600" b="0">
+              <a:rPr sz="1680" b="0">
                 <a:solidFill>
                   <a:srgbClr val="000000"/>
                 </a:solidFill>
@@ -23430,7 +23430,7 @@
               </a:spcAft>
             </a:pPr>
             <a:r>
-              <a:rPr sz="1600" b="0">
+              <a:rPr sz="1680" b="0">
                 <a:solidFill>
                   <a:srgbClr val="000000"/>
                 </a:solidFill>
